--- a/Documents/Presentation Template_portfolio-website.pptx
+++ b/Documents/Presentation Template_portfolio-website.pptx
@@ -17704,7 +17704,7 @@
         </p:nvSpPr>
         <p:spPr>
           <a:xfrm>
-            <a:off x="1364897" y="2140807"/>
+            <a:off x="1553583" y="1926720"/>
             <a:ext cx="6048531" cy="1477328"/>
           </a:xfrm>
           <a:prstGeom prst="rect">
@@ -18368,7 +18368,7 @@
         <p:spPr>
           <a:xfrm>
             <a:off x="4779396" y="4605476"/>
-            <a:ext cx="1340432" cy="307777"/>
+            <a:ext cx="3728906" cy="246221"/>
           </a:xfrm>
           <a:prstGeom prst="rect">
             <a:avLst/>
@@ -18381,10 +18381,39 @@
           <a:lstStyle/>
           <a:p>
             <a:r>
-              <a:rPr lang="en-US" dirty="0" smtClean="0"/>
-              <a:t>Website URL: </a:t>
-            </a:r>
-            <a:endParaRPr lang="en-US" dirty="0"/>
+              <a:rPr lang="en-US" sz="1000" b="1" dirty="0" smtClean="0">
+                <a:solidFill>
+                  <a:schemeClr val="accent1"/>
+                </a:solidFill>
+                <a:latin typeface="Assistant" panose="020B0604020202020204" charset="-79"/>
+                <a:cs typeface="Assistant" panose="020B0604020202020204" charset="-79"/>
+                <a:hlinkClick r:id="rId4"/>
+              </a:rPr>
+              <a:t>Website </a:t>
+            </a:r>
+            <a:r>
+              <a:rPr lang="en-US" sz="1000" b="1" dirty="0">
+                <a:solidFill>
+                  <a:schemeClr val="accent1"/>
+                </a:solidFill>
+                <a:latin typeface="Assistant" panose="020B0604020202020204" charset="-79"/>
+                <a:cs typeface="Assistant" panose="020B0604020202020204" charset="-79"/>
+                <a:hlinkClick r:id="rId4"/>
+              </a:rPr>
+              <a:t>URL: </a:t>
+            </a:r>
+            <a:r>
+              <a:rPr lang="en-US" sz="1000" dirty="0">
+                <a:latin typeface="Assistant" panose="020B0604020202020204" charset="-79"/>
+                <a:cs typeface="Assistant" panose="020B0604020202020204" charset="-79"/>
+                <a:hlinkClick r:id="rId4"/>
+              </a:rPr>
+              <a:t>https://albert-raphael.github.io/portfolio-website/ </a:t>
+            </a:r>
+            <a:endParaRPr lang="en-US" sz="1000" dirty="0">
+              <a:latin typeface="Assistant" panose="020B0604020202020204" charset="-79"/>
+              <a:cs typeface="Assistant" panose="020B0604020202020204" charset="-79"/>
+            </a:endParaRPr>
           </a:p>
         </p:txBody>
       </p:sp>
@@ -18783,6 +18812,8 @@
                 <a:solidFill>
                   <a:schemeClr val="accent1"/>
                 </a:solidFill>
+                <a:latin typeface="Assistant" panose="020B0604020202020204" charset="-79"/>
+                <a:cs typeface="Assistant" panose="020B0604020202020204" charset="-79"/>
               </a:rPr>
               <a:t>Key </a:t>
             </a:r>
@@ -18791,6 +18822,8 @@
                 <a:solidFill>
                   <a:schemeClr val="accent1"/>
                 </a:solidFill>
+                <a:latin typeface="Assistant" panose="020B0604020202020204" charset="-79"/>
+                <a:cs typeface="Assistant" panose="020B0604020202020204" charset="-79"/>
               </a:rPr>
               <a:t>Features</a:t>
             </a:r>
@@ -18798,6 +18831,8 @@
               <a:solidFill>
                 <a:schemeClr val="accent1"/>
               </a:solidFill>
+              <a:latin typeface="Assistant" panose="020B0604020202020204" charset="-79"/>
+              <a:cs typeface="Assistant" panose="020B0604020202020204" charset="-79"/>
             </a:endParaRPr>
           </a:p>
           <a:p>
@@ -20525,7 +20560,7 @@
           <a:lstStyle/>
           <a:p>
             <a:r>
-              <a:rPr lang="en-GB" sz="1800" dirty="0" smtClean="0">
+              <a:rPr lang="en-GB" sz="1800" b="1" dirty="0" smtClean="0">
                 <a:solidFill>
                   <a:schemeClr val="accent1"/>
                 </a:solidFill>
@@ -21193,10 +21228,18 @@
               <a:buNone/>
             </a:pPr>
             <a:r>
-              <a:rPr lang="en" sz="1400" b="1" dirty="0"/>
+              <a:rPr lang="en" sz="1700" b="1" dirty="0">
+                <a:solidFill>
+                  <a:schemeClr val="accent1"/>
+                </a:solidFill>
+              </a:rPr>
               <a:t>Contact</a:t>
             </a:r>
-            <a:endParaRPr sz="1400" b="1" dirty="0"/>
+            <a:endParaRPr sz="1700" b="1" dirty="0">
+              <a:solidFill>
+                <a:schemeClr val="accent1"/>
+              </a:solidFill>
+            </a:endParaRPr>
           </a:p>
           <a:p>
             <a:pPr marL="0" lvl="0" indent="0" algn="l" rtl="0">
@@ -21332,10 +21375,10 @@
               <a:buNone/>
             </a:pPr>
             <a:r>
-              <a:rPr lang="en"/>
+              <a:rPr lang="en" dirty="0"/>
               <a:t>Thanks a lot!</a:t>
             </a:r>
-            <a:endParaRPr/>
+            <a:endParaRPr dirty="0"/>
           </a:p>
         </p:txBody>
       </p:sp>
